--- a/Topic_C/Exam_Practice/TC-L10_Writing_Workshop_Measurements_Shapes_Materials.pptx
+++ b/Topic_C/Exam_Practice/TC-L10_Writing_Workshop_Measurements_Shapes_Materials.pptx
@@ -784,7 +784,11 @@
           <a:lstStyle/>
           <a:p>
             <a:r>
-              <a:rPr lang="en-US" dirty="0"/>
+              <a:rPr lang="ar-SA" dirty="0">
+                <a:latin typeface="Amiri" pitchFamily="2" charset="-78"/>
+                <a:ea typeface="Amiri" pitchFamily="2" charset="-78"/>
+                <a:cs typeface="Amiri" pitchFamily="2" charset="-78"/>
+              </a:rPr>
               <a:t>Q3 (3 min to choose and read). Title (أ) suits Core and Develop; title (ب) suits Stretch.</a:t>
             </a:r>
             <a:endParaRPr lang="en-US" dirty="0"/>
@@ -1403,7 +1407,11 @@
           <a:lstStyle/>
           <a:p>
             <a:r>
-              <a:rPr lang="en-US" dirty="0"/>
+              <a:rPr lang="ar-SA" dirty="0">
+                <a:latin typeface="Amiri" pitchFamily="2" charset="-78"/>
+                <a:ea typeface="Amiri" pitchFamily="2" charset="-78"/>
+                <a:cs typeface="Amiri" pitchFamily="2" charset="-78"/>
+              </a:rPr>
               <a:t>WELCOME (1 min) — while students join.
 • Greet each student by name as they arrive: السَّلَامُ عَلَيْكُمْ. Take the register (Pastoral Tracker: attendance 0/1).
 • 2-MINUTE CHECK-IN (SEND training): a private chat to any student who seemed unsettled last lesson — “Are you okay today? 👍 / 👎”.
@@ -1936,7 +1944,11 @@
           <a:lstStyle/>
           <a:p>
             <a:r>
-              <a:rPr lang="en-US" dirty="0"/>
+              <a:rPr lang="ar-SA" dirty="0">
+                <a:latin typeface="Amiri" pitchFamily="2" charset="-78"/>
+                <a:ea typeface="Amiri" pitchFamily="2" charset="-78"/>
+                <a:cs typeface="Amiri" pitchFamily="2" charset="-78"/>
+              </a:rPr>
               <a:t>Question words: مَتَى (when) · أَيْنَ (where) · صِفْ (describe!) · مَاذَا (what) · لِمَاذَا (why) — bullet 1 is PAST, bullet 4 is FUTURE.</a:t>
             </a:r>
             <a:endParaRPr lang="en-US" dirty="0"/>
@@ -2508,6 +2520,7 @@
                   <a:srgbClr val="D4AF37"/>
                 </a:solidFill>
                 <a:latin typeface="Amiri" pitchFamily="2" charset="-78"/>
+                <a:ea typeface="Amiri" pitchFamily="2" charset="-78"/>
                 <a:cs typeface="Amiri" pitchFamily="2" charset="-78"/>
               </a:rPr>
               <a:t>م</a:t>
@@ -2714,6 +2727,7 @@
                   <a:srgbClr val="D4AF37"/>
                 </a:solidFill>
                 <a:latin typeface="Amiri" pitchFamily="2" charset="-78"/>
+                <a:ea typeface="Amiri" pitchFamily="2" charset="-78"/>
                 <a:cs typeface="Amiri" pitchFamily="2" charset="-78"/>
               </a:rPr>
               <a:t>وَرْشَةُ الكِتَابَةِ — المَقَايِيسُ وَالأَشْكَالُ</a:t>
@@ -3171,6 +3185,7 @@
                   <a:srgbClr val="D4AF37"/>
                 </a:solidFill>
                 <a:latin typeface="Amiri" pitchFamily="2" charset="-78"/>
+                <a:ea typeface="Amiri" pitchFamily="2" charset="-78"/>
                 <a:cs typeface="Amiri" pitchFamily="2" charset="-78"/>
               </a:rPr>
               <a:t>م</a:t>
@@ -3491,6 +3506,7 @@
                   <a:srgbClr val="8A6D1E"/>
                 </a:solidFill>
                 <a:latin typeface="Amiri" pitchFamily="2" charset="-78"/>
+                <a:ea typeface="Amiri" pitchFamily="2" charset="-78"/>
                 <a:cs typeface="Amiri" pitchFamily="2" charset="-78"/>
               </a:rPr>
               <a:t>نَمُوذَجُ الإِجَابَةِ</a:t>
@@ -3604,6 +3620,7 @@
                   <a:srgbClr val="1F2A37"/>
                 </a:solidFill>
                 <a:latin typeface="Amiri" pitchFamily="2" charset="-78"/>
+                <a:ea typeface="Amiri" pitchFamily="2" charset="-78"/>
                 <a:cs typeface="Amiri" pitchFamily="2" charset="-78"/>
               </a:rPr>
               <a:t>إِلَى مَكْتَبِ المَفْقُودَاتِ فِي المَطَارِ،</a:t>
@@ -3623,6 +3640,7 @@
                   <a:srgbClr val="1F2A37"/>
                 </a:solidFill>
                 <a:latin typeface="Amiri" pitchFamily="2" charset="-78"/>
+                <a:ea typeface="Amiri" pitchFamily="2" charset="-78"/>
                 <a:cs typeface="Amiri" pitchFamily="2" charset="-78"/>
               </a:rPr>
               <a:t>اسْمِي آدَمُ يُوسُفُ. أَمْسِ وَصَلْتُ مِنْ دُبَيّ فِي الرِّحْلَةِ رَقْمِ ٢٠٤، وَنَسِيتُ حَقِيبَةً صَغِيرَةً فِي الطَّائِرَةِ. الحَقِيبَةُ زَرْقَاءُ، وَمَصْنُوعَةٌ مِنَ الجِلْدِ. شَكْلُهَا مُسْتَطِيلٌ، وَطُولُهَا ثَلَاثُونَ سَنْتِيمِتْرًا تَقْرِيبًا. فِيهَا حَاسُوبٌ مَحْمُولٌ وَكِتَابٌ عَرَبِيٌّ وَشَاحِنٌ أَبْيَضُ. هٰذِهِ الحَقِيبَةُ مُهِمَّةٌ جِدًّا لِي، لِأَنَّ الحَاسُوبَ فِيهِ كُلُّ وَاجِبَاتِي المَدْرَسِيَّةِ. أَرْجُو أَنْ تَتَّصِلُوا بِي إِذَا وَجَدْتُمُوهَا. سَأَكُونُ فِي البَيْتِ كُلَّ يَوْمٍ بَعْدَ السَّاعَةِ الرَّابِعَةِ.</a:t>
@@ -3642,6 +3660,7 @@
                   <a:srgbClr val="1F2A37"/>
                 </a:solidFill>
                 <a:latin typeface="Amiri" pitchFamily="2" charset="-78"/>
+                <a:ea typeface="Amiri" pitchFamily="2" charset="-78"/>
                 <a:cs typeface="Amiri" pitchFamily="2" charset="-78"/>
               </a:rPr>
               <a:t>مَعَ الشُّكْرِ،</a:t>
@@ -3661,6 +3680,7 @@
                   <a:srgbClr val="1F2A37"/>
                 </a:solidFill>
                 <a:latin typeface="Amiri" pitchFamily="2" charset="-78"/>
+                <a:ea typeface="Amiri" pitchFamily="2" charset="-78"/>
                 <a:cs typeface="Amiri" pitchFamily="2" charset="-78"/>
               </a:rPr>
               <a:t>آدَمُ يُوسُفُ</a:t>
@@ -3824,11 +3844,12 @@
               <a:buNone/>
             </a:pPr>
             <a:r>
-              <a:rPr lang="en-US" sz="950" b="1" dirty="0">
+              <a:rPr lang="ar-SA" sz="950" b="1" dirty="0">
                 <a:solidFill>
                   <a:srgbClr val="FFFFFF"/>
                 </a:solidFill>
                 <a:latin typeface="Calibri" pitchFamily="34" charset="0"/>
+                <a:ea typeface="Amiri" pitchFamily="2" charset="-78"/>
                 <a:cs typeface="Amiri" pitchFamily="2" charset="-78"/>
               </a:rPr>
               <a:t>مَصْنُوعَةٌ مِنَ الجِلْدِ</a:t>
@@ -3889,11 +3910,12 @@
               <a:buNone/>
             </a:pPr>
             <a:r>
-              <a:rPr lang="en-US" sz="950" b="1" dirty="0">
+              <a:rPr lang="ar-SA" sz="950" b="1" dirty="0">
                 <a:solidFill>
                   <a:srgbClr val="FFFFFF"/>
                 </a:solidFill>
                 <a:latin typeface="Calibri" pitchFamily="34" charset="0"/>
+                <a:ea typeface="Amiri" pitchFamily="2" charset="-78"/>
                 <a:cs typeface="Amiri" pitchFamily="2" charset="-78"/>
               </a:rPr>
               <a:t>شَكْلُهَا مُسْتَطِيلٌ</a:t>
@@ -3954,11 +3976,12 @@
               <a:buNone/>
             </a:pPr>
             <a:r>
-              <a:rPr lang="en-US" sz="950" b="1" dirty="0">
+              <a:rPr lang="ar-SA" sz="950" b="1" dirty="0">
                 <a:solidFill>
                   <a:srgbClr val="FFFFFF"/>
                 </a:solidFill>
                 <a:latin typeface="Calibri" pitchFamily="34" charset="0"/>
+                <a:ea typeface="Amiri" pitchFamily="2" charset="-78"/>
                 <a:cs typeface="Amiri" pitchFamily="2" charset="-78"/>
               </a:rPr>
               <a:t>طُولُهَا ثَلَاثُونَ</a:t>
@@ -4019,11 +4042,12 @@
               <a:buNone/>
             </a:pPr>
             <a:r>
-              <a:rPr lang="en-US" sz="950" b="1" dirty="0">
+              <a:rPr lang="ar-SA" sz="950" b="1" dirty="0">
                 <a:solidFill>
                   <a:srgbClr val="FFFFFF"/>
                 </a:solidFill>
                 <a:latin typeface="Calibri" pitchFamily="34" charset="0"/>
+                <a:ea typeface="Amiri" pitchFamily="2" charset="-78"/>
                 <a:cs typeface="Amiri" pitchFamily="2" charset="-78"/>
               </a:rPr>
               <a:t>سَأَكُونُ فِي البَيْتِ</a:t>
@@ -4157,6 +4181,7 @@
                   <a:srgbClr val="D4AF37"/>
                 </a:solidFill>
                 <a:latin typeface="Amiri" pitchFamily="2" charset="-78"/>
+                <a:ea typeface="Amiri" pitchFamily="2" charset="-78"/>
                 <a:cs typeface="Amiri" pitchFamily="2" charset="-78"/>
               </a:rPr>
               <a:t>م</a:t>
@@ -4477,6 +4502,7 @@
                   <a:srgbClr val="8A6D1E"/>
                 </a:solidFill>
                 <a:latin typeface="Amiri" pitchFamily="2" charset="-78"/>
+                <a:ea typeface="Amiri" pitchFamily="2" charset="-78"/>
                 <a:cs typeface="Amiri" pitchFamily="2" charset="-78"/>
               </a:rPr>
               <a:t>نَمُوذَجُ الإِجَابَةِ</a:t>
@@ -4590,6 +4616,7 @@
                   <a:srgbClr val="1F2A37"/>
                 </a:solidFill>
                 <a:latin typeface="Amiri" pitchFamily="2" charset="-78"/>
+                <a:ea typeface="Amiri" pitchFamily="2" charset="-78"/>
                 <a:cs typeface="Amiri" pitchFamily="2" charset="-78"/>
               </a:rPr>
               <a:t>حَضْرَةَ المَسْؤُولِ عَنْ مَكْتَبِ المَفْقُودَاتِ المُحْتَرَمِ،</a:t>
@@ -4609,6 +4636,7 @@
                   <a:srgbClr val="1F2A37"/>
                 </a:solidFill>
                 <a:latin typeface="Amiri" pitchFamily="2" charset="-78"/>
+                <a:ea typeface="Amiri" pitchFamily="2" charset="-78"/>
                 <a:cs typeface="Amiri" pitchFamily="2" charset="-78"/>
               </a:rPr>
               <a:t>أَكْتُبُ إِلَيْكُمْ لِأُبَلِّغَ عَنْ حَقِيبَةٍ فَقَدْتُهَا أَمْسِ عَلَى مَتْنِ الرِّحْلَةِ رَقْمِ ٢٠٤ القَادِمَةِ مِنْ دُبَيّ؛ إِذْ وَضَعْتُهَا تَحْتَ المَقْعَدِ، وَنَسِيتُهَا عِنْدَ النُّزُولِ. وَهِيَ حَقِيبَةٌ جِلْدِيَّةٌ زَرْقَاءُ دَاكِنَةٌ، مُسْتَطِيلَةُ الشَّكْلِ، طُولُهَا نَحْوُ ثَلَاثِينَ سَنْتِيمِتْرًا، وَعَلَى جَانِبِهَا حَرْفَا اسْمِي مَحْفُورَانِ بِاللَّوْنِ الذَّهَبِيِّ. وَبِدَاخِلِهَا حَاسُوبٌ مَحْمُولٌ فِضِّيٌّ يَحْتَوِي عَلَى مَشْرُوعِي النِّهَائِيِّ الَّذِي يَجِبُ أَنْ أُسَلِّمَهُ الأُسْبُوعَ القَادِمَ. لِذٰلِكَ أَرْجُو أَنْ تُبْلِغُونِي فَوْرَ العُثُورِ عَلَيْهَا، وَسَأَحْضُرُ بِنَفْسِي لِاسْتِلَامِهَا مَعَ جَوَازِ سَفَرِي وَبِطَاقَةِ الصُّعُودِ إِلَى الطَّائِرَةِ.</a:t>
@@ -4628,6 +4656,7 @@
                   <a:srgbClr val="1F2A37"/>
                 </a:solidFill>
                 <a:latin typeface="Amiri" pitchFamily="2" charset="-78"/>
+                <a:ea typeface="Amiri" pitchFamily="2" charset="-78"/>
                 <a:cs typeface="Amiri" pitchFamily="2" charset="-78"/>
               </a:rPr>
               <a:t>مَعَ خَالِصِ الشُّكْرِ،</a:t>
@@ -4647,6 +4676,7 @@
                   <a:srgbClr val="1F2A37"/>
                 </a:solidFill>
                 <a:latin typeface="Amiri" pitchFamily="2" charset="-78"/>
+                <a:ea typeface="Amiri" pitchFamily="2" charset="-78"/>
                 <a:cs typeface="Amiri" pitchFamily="2" charset="-78"/>
               </a:rPr>
               <a:t>آدَمُ يُوسُفُ</a:t>
@@ -4810,11 +4840,12 @@
               <a:buNone/>
             </a:pPr>
             <a:r>
-              <a:rPr lang="en-US" sz="950" b="1" dirty="0">
+              <a:rPr lang="ar-SA" sz="950" b="1" dirty="0">
                 <a:solidFill>
                   <a:srgbClr val="FFFFFF"/>
                 </a:solidFill>
                 <a:latin typeface="Calibri" pitchFamily="34" charset="0"/>
+                <a:ea typeface="Amiri" pitchFamily="2" charset="-78"/>
                 <a:cs typeface="Amiri" pitchFamily="2" charset="-78"/>
               </a:rPr>
               <a:t>لِأُبَلِّغَ عَنْ</a:t>
@@ -4875,11 +4906,12 @@
               <a:buNone/>
             </a:pPr>
             <a:r>
-              <a:rPr lang="en-US" sz="950" b="1" dirty="0">
+              <a:rPr lang="ar-SA" sz="950" b="1" dirty="0">
                 <a:solidFill>
                   <a:srgbClr val="FFFFFF"/>
                 </a:solidFill>
                 <a:latin typeface="Calibri" pitchFamily="34" charset="0"/>
+                <a:ea typeface="Amiri" pitchFamily="2" charset="-78"/>
                 <a:cs typeface="Amiri" pitchFamily="2" charset="-78"/>
               </a:rPr>
               <a:t>مُسْتَطِيلَةُ الشَّكْلِ</a:t>
@@ -4940,11 +4972,12 @@
               <a:buNone/>
             </a:pPr>
             <a:r>
-              <a:rPr lang="en-US" sz="950" b="1" dirty="0">
+              <a:rPr lang="ar-SA" sz="950" b="1" dirty="0">
                 <a:solidFill>
                   <a:srgbClr val="FFFFFF"/>
                 </a:solidFill>
                 <a:latin typeface="Calibri" pitchFamily="34" charset="0"/>
+                <a:ea typeface="Amiri" pitchFamily="2" charset="-78"/>
                 <a:cs typeface="Amiri" pitchFamily="2" charset="-78"/>
               </a:rPr>
               <a:t>حَرْفَا اسْمِي مَحْفُورَانِ</a:t>
@@ -5005,11 +5038,12 @@
               <a:buNone/>
             </a:pPr>
             <a:r>
-              <a:rPr lang="en-US" sz="950" b="1" dirty="0">
+              <a:rPr lang="ar-SA" sz="950" b="1" dirty="0">
                 <a:solidFill>
                   <a:srgbClr val="FFFFFF"/>
                 </a:solidFill>
                 <a:latin typeface="Calibri" pitchFamily="34" charset="0"/>
+                <a:ea typeface="Amiri" pitchFamily="2" charset="-78"/>
                 <a:cs typeface="Amiri" pitchFamily="2" charset="-78"/>
               </a:rPr>
               <a:t>الَّذِي يَجِبُ أَنْ أُسَلِّمَهُ</a:t>
@@ -5143,6 +5177,7 @@
                   <a:srgbClr val="D4AF37"/>
                 </a:solidFill>
                 <a:latin typeface="Amiri" pitchFamily="2" charset="-78"/>
+                <a:ea typeface="Amiri" pitchFamily="2" charset="-78"/>
                 <a:cs typeface="Amiri" pitchFamily="2" charset="-78"/>
               </a:rPr>
               <a:t>م</a:t>
@@ -5463,6 +5498,7 @@
                   <a:srgbClr val="8A6D1E"/>
                 </a:solidFill>
                 <a:latin typeface="Amiri" pitchFamily="2" charset="-78"/>
+                <a:ea typeface="Amiri" pitchFamily="2" charset="-78"/>
                 <a:cs typeface="Amiri" pitchFamily="2" charset="-78"/>
               </a:rPr>
               <a:t>اخْتَرْ عُنْوَانًا وَاحِدًا</a:t>
@@ -5743,6 +5779,7 @@
                   <a:srgbClr val="1B3B6F"/>
                 </a:solidFill>
                 <a:latin typeface="Amiri" pitchFamily="2" charset="-78"/>
+                <a:ea typeface="Amiri" pitchFamily="2" charset="-78"/>
                 <a:cs typeface="Amiri" pitchFamily="2" charset="-78"/>
               </a:rPr>
               <a:t>أَشْيَاءُ لَهَا قِيمَةٌ عِنْدِي</a:t>
@@ -5781,6 +5818,7 @@
                   <a:srgbClr val="1B3B6F"/>
                 </a:solidFill>
                 <a:latin typeface="Amiri" pitchFamily="2" charset="-78"/>
+                <a:ea typeface="Amiri" pitchFamily="2" charset="-78"/>
                 <a:cs typeface="Amiri" pitchFamily="2" charset="-78"/>
               </a:rPr>
               <a:t>(أ)</a:t>
@@ -5887,6 +5925,7 @@
                   <a:srgbClr val="1B3B6F"/>
                 </a:solidFill>
                 <a:latin typeface="Amiri" pitchFamily="2" charset="-78"/>
+                <a:ea typeface="Amiri" pitchFamily="2" charset="-78"/>
                 <a:cs typeface="Amiri" pitchFamily="2" charset="-78"/>
               </a:rPr>
               <a:t>شَيْءٌ تَسْتَخْدِمُهُ كُلَّ يَوْمٍ · شَيْءٌ لَهُ ذِكْرَى · شَيْءٌ صَنَعْتَهُ أَوْ أَصْلَحْتَهُ · رَأْيُكَ فِي الأَشْيَاءِ القَدِيمَةِ وَالحَدِيثَةِ</a:t>
@@ -6018,6 +6057,7 @@
                   <a:srgbClr val="1B3B6F"/>
                 </a:solidFill>
                 <a:latin typeface="Amiri" pitchFamily="2" charset="-78"/>
+                <a:ea typeface="Amiri" pitchFamily="2" charset="-78"/>
                 <a:cs typeface="Amiri" pitchFamily="2" charset="-78"/>
               </a:rPr>
               <a:t>المَوَادُّ الَّتِي نَسْتَخْدِمُهَا وَالبِيئَةُ</a:t>
@@ -6056,6 +6096,7 @@
                   <a:srgbClr val="1B3B6F"/>
                 </a:solidFill>
                 <a:latin typeface="Amiri" pitchFamily="2" charset="-78"/>
+                <a:ea typeface="Amiri" pitchFamily="2" charset="-78"/>
                 <a:cs typeface="Amiri" pitchFamily="2" charset="-78"/>
               </a:rPr>
               <a:t>(ب)</a:t>
@@ -6159,6 +6200,7 @@
                   <a:srgbClr val="1B3B6F"/>
                 </a:solidFill>
                 <a:latin typeface="Amiri" pitchFamily="2" charset="-78"/>
+                <a:ea typeface="Amiri" pitchFamily="2" charset="-78"/>
                 <a:cs typeface="Amiri" pitchFamily="2" charset="-78"/>
               </a:rPr>
               <a:t>عَصْرُ البْلَاسْتِيكِ · المَاضِي وَالحَاضِرُ · تَجْرِبَةٌ أَوْ مِثَالٌ · رَأْيُكَ وَالحَلُّ</a:t>
@@ -6358,6 +6400,7 @@
                   <a:srgbClr val="D4AF37"/>
                 </a:solidFill>
                 <a:latin typeface="Amiri" pitchFamily="2" charset="-78"/>
+                <a:ea typeface="Amiri" pitchFamily="2" charset="-78"/>
                 <a:cs typeface="Amiri" pitchFamily="2" charset="-78"/>
               </a:rPr>
               <a:t>م</a:t>
@@ -6678,6 +6721,7 @@
                   <a:srgbClr val="8A6D1E"/>
                 </a:solidFill>
                 <a:latin typeface="Amiri" pitchFamily="2" charset="-78"/>
+                <a:ea typeface="Amiri" pitchFamily="2" charset="-78"/>
                 <a:cs typeface="Amiri" pitchFamily="2" charset="-78"/>
               </a:rPr>
               <a:t>خُطَّةُ الكِتَابَةِ</a:t>
@@ -7302,6 +7346,7 @@
                   <a:srgbClr val="1B3B6F"/>
                 </a:solidFill>
                 <a:latin typeface="Amiri" pitchFamily="2" charset="-78"/>
+                <a:ea typeface="Amiri" pitchFamily="2" charset="-78"/>
                 <a:cs typeface="Amiri" pitchFamily="2" charset="-78"/>
               </a:rPr>
               <a:t>مَكْتَبِي مَصْنُوعٌ مِنَ الخَشَبِ، وَطُولُهُ مِتْرٌ وَعِشْرُونَ سَنْتِيمِتْرًا.</a:t>
@@ -7401,6 +7446,7 @@
                   <a:srgbClr val="1B3B6F"/>
                 </a:solidFill>
                 <a:latin typeface="Amiri" pitchFamily="2" charset="-78"/>
+                <a:ea typeface="Amiri" pitchFamily="2" charset="-78"/>
                 <a:cs typeface="Amiri" pitchFamily="2" charset="-78"/>
               </a:rPr>
               <a:t>كَانَ طُولُهُ أَرْبَعِينَ سَنْتِيمِتْرًا، وَلَوَّنْتُهُ بِالأَخْضَرِ.</a:t>
@@ -7500,6 +7546,7 @@
                   <a:srgbClr val="1B3B6F"/>
                 </a:solidFill>
                 <a:latin typeface="Amiri" pitchFamily="2" charset="-78"/>
+                <a:ea typeface="Amiri" pitchFamily="2" charset="-78"/>
                 <a:cs typeface="Amiri" pitchFamily="2" charset="-78"/>
               </a:rPr>
               <a:t>سَأَصْنَعُ رَفًّا لِلْكُتُبِ بِنَفْسِي.</a:t>
@@ -7661,6 +7708,7 @@
                   <a:srgbClr val="1F2A37"/>
                 </a:solidFill>
                 <a:latin typeface="Amiri" pitchFamily="2" charset="-78"/>
+                <a:ea typeface="Amiri" pitchFamily="2" charset="-78"/>
                 <a:cs typeface="Amiri" pitchFamily="2" charset="-78"/>
               </a:rPr>
               <a:t>أ</a:t>
@@ -7687,6 +7735,7 @@
                   <a:srgbClr val="1F2A37"/>
                 </a:solidFill>
                 <a:latin typeface="Amiri" pitchFamily="2" charset="-78"/>
+                <a:ea typeface="Amiri" pitchFamily="2" charset="-78"/>
                 <a:cs typeface="Amiri" pitchFamily="2" charset="-78"/>
               </a:rPr>
               <a:t>ب</a:t>
@@ -7833,6 +7882,7 @@
                   <a:srgbClr val="D4AF37"/>
                 </a:solidFill>
                 <a:latin typeface="Amiri" pitchFamily="2" charset="-78"/>
+                <a:ea typeface="Amiri" pitchFamily="2" charset="-78"/>
                 <a:cs typeface="Amiri" pitchFamily="2" charset="-78"/>
               </a:rPr>
               <a:t>م</a:t>
@@ -8090,6 +8140,7 @@
                   <a:srgbClr val="8A6D1E"/>
                 </a:solidFill>
                 <a:latin typeface="Amiri" pitchFamily="2" charset="-78"/>
+                <a:ea typeface="Amiri" pitchFamily="2" charset="-78"/>
                 <a:cs typeface="Amiri" pitchFamily="2" charset="-78"/>
               </a:rPr>
               <a:t>أ</a:t>
@@ -8154,6 +8205,7 @@
                   <a:srgbClr val="1B3B6F"/>
                 </a:solidFill>
                 <a:latin typeface="Amiri" pitchFamily="2" charset="-78"/>
+                <a:ea typeface="Amiri" pitchFamily="2" charset="-78"/>
                 <a:cs typeface="Amiri" pitchFamily="2" charset="-78"/>
               </a:rPr>
               <a:t>أ</a:t>
@@ -8205,6 +8257,7 @@
                   <a:srgbClr val="8A6D1E"/>
                 </a:solidFill>
                 <a:latin typeface="Amiri" pitchFamily="2" charset="-78"/>
+                <a:ea typeface="Amiri" pitchFamily="2" charset="-78"/>
                 <a:cs typeface="Amiri" pitchFamily="2" charset="-78"/>
               </a:rPr>
               <a:t>نَمُوذَجُ الإِجَابَةِ</a:t>
@@ -8318,6 +8371,7 @@
                   <a:srgbClr val="1F2A37"/>
                 </a:solidFill>
                 <a:latin typeface="Amiri" pitchFamily="2" charset="-78"/>
+                <a:ea typeface="Amiri" pitchFamily="2" charset="-78"/>
                 <a:cs typeface="Amiri" pitchFamily="2" charset="-78"/>
               </a:rPr>
               <a:t>فِي غُرْفَتِي أَشْيَاءُ كَثِيرَةٌ، لٰكِنَّ أَهَمَّهَا مَكْتَبِي. هُوَ مَصْنُوعٌ مِنَ الخَشَبِ، وَلَوْنُهُ بُنِّيٌّ فَاتِحٌ. شَكْلُهُ مُسْتَطِيلٌ، وَطُولُهُ مِتْرٌ وَعِشْرُونَ سَنْتِيمِتْرًا. عَلَيْهِ حَاسُوبِي وَكُتُبِي وَمِصْبَاحٌ صَغِيرٌ. أَجْلِسُ إِلَيْهِ كُلَّ يَوْمٍ سَاعَتَيْنِ لِأَدْرُسَ.</a:t>
@@ -8337,6 +8391,7 @@
                   <a:srgbClr val="1F2A37"/>
                 </a:solidFill>
                 <a:latin typeface="Amiri" pitchFamily="2" charset="-78"/>
+                <a:ea typeface="Amiri" pitchFamily="2" charset="-78"/>
                 <a:cs typeface="Amiri" pitchFamily="2" charset="-78"/>
               </a:rPr>
               <a:t>عِنْدِي أَيْضًا سَاعَةٌ قَدِيمَةٌ أُحِبُّهَا كَثِيرًا. هِيَ دَائِرِيَّةٌ، وَمَصْنُوعَةٌ مِنَ الفِضَّةِ وَالجِلْدِ. أَهْدَاهَا لِي جَدِّي قَبْلَ أَنْ يُسَافِرَ إِلَى مِصْرَ، لِذٰلِكَ هِيَ مُهِمَّةٌ جِدًّا لِي، وَأَلْبَسُهَا فِي المُنَاسَبَاتِ فَقَطْ.</a:t>
@@ -8356,6 +8411,7 @@
                   <a:srgbClr val="1F2A37"/>
                 </a:solidFill>
                 <a:latin typeface="Amiri" pitchFamily="2" charset="-78"/>
+                <a:ea typeface="Amiri" pitchFamily="2" charset="-78"/>
                 <a:cs typeface="Amiri" pitchFamily="2" charset="-78"/>
               </a:rPr>
               <a:t>فِي السَّنَةِ المَاضِيَةِ صَنَعْتُ صُنْدُوقًا خَشَبِيًّا فِي حِصَّةِ التِّكْنُولُوجْيَا. كَانَ طُولُهُ أَرْبَعِينَ سَنْتِيمِتْرًا، وَعَرْضُهُ عِشْرِينَ. لَوَّنْتُهُ بِالأَخْضَرِ، وَأَعْطَيْتُهُ لِأُمِّي هَدِيَّةً، فَوَضَعَتْ فِيهِ صُوَرَ العَائِلَةِ.</a:t>
@@ -8375,6 +8431,7 @@
                   <a:srgbClr val="1F2A37"/>
                 </a:solidFill>
                 <a:latin typeface="Amiri" pitchFamily="2" charset="-78"/>
+                <a:ea typeface="Amiri" pitchFamily="2" charset="-78"/>
                 <a:cs typeface="Amiri" pitchFamily="2" charset="-78"/>
               </a:rPr>
               <a:t>فِي رَأْيِي، الأَشْيَاءُ المَصْنُوعَةُ مِنَ الخَشَبِ وَالمَعْدِنِ أَفْضَلُ مِنَ البْلَاسْتِيكِ، لِأَنَّهَا أَقْوَى وَتَدُومُ أَطْوَلَ. فِي المُسْتَقْبَلِ سَأَشْتَرِي أَشْيَاءَ قَلِيلَةً وَجَيِّدَةً، وَسَأَصْنَعُ رَفًّا لِلْكُتُبِ بِنَفْسِي، طُولُهُ مِتْرَانِ.</a:t>
@@ -8538,11 +8595,12 @@
               <a:buNone/>
             </a:pPr>
             <a:r>
-              <a:rPr lang="en-US" sz="950" b="1" dirty="0">
+              <a:rPr lang="ar-SA" sz="950" b="1" dirty="0">
                 <a:solidFill>
                   <a:srgbClr val="FFFFFF"/>
                 </a:solidFill>
                 <a:latin typeface="Calibri" pitchFamily="34" charset="0"/>
+                <a:ea typeface="Amiri" pitchFamily="2" charset="-78"/>
                 <a:cs typeface="Amiri" pitchFamily="2" charset="-78"/>
               </a:rPr>
               <a:t>مَصْنُوعٌ مِنَ الخَشَبِ</a:t>
@@ -8603,11 +8661,12 @@
               <a:buNone/>
             </a:pPr>
             <a:r>
-              <a:rPr lang="en-US" sz="950" b="1" dirty="0">
+              <a:rPr lang="ar-SA" sz="950" b="1" dirty="0">
                 <a:solidFill>
                   <a:srgbClr val="FFFFFF"/>
                 </a:solidFill>
                 <a:latin typeface="Calibri" pitchFamily="34" charset="0"/>
+                <a:ea typeface="Amiri" pitchFamily="2" charset="-78"/>
                 <a:cs typeface="Amiri" pitchFamily="2" charset="-78"/>
               </a:rPr>
               <a:t>دَائِرِيَّةٌ، وَمَصْنُوعَةٌ</a:t>
@@ -8668,11 +8727,12 @@
               <a:buNone/>
             </a:pPr>
             <a:r>
-              <a:rPr lang="en-US" sz="950" b="1" dirty="0">
+              <a:rPr lang="ar-SA" sz="950" b="1" dirty="0">
                 <a:solidFill>
                   <a:srgbClr val="FFFFFF"/>
                 </a:solidFill>
                 <a:latin typeface="Calibri" pitchFamily="34" charset="0"/>
+                <a:ea typeface="Amiri" pitchFamily="2" charset="-78"/>
                 <a:cs typeface="Amiri" pitchFamily="2" charset="-78"/>
               </a:rPr>
               <a:t>كَانَ طُولُهُ أَرْبَعِينَ</a:t>
@@ -8733,11 +8793,12 @@
               <a:buNone/>
             </a:pPr>
             <a:r>
-              <a:rPr lang="en-US" sz="950" b="1" dirty="0">
+              <a:rPr lang="ar-SA" sz="950" b="1" dirty="0">
                 <a:solidFill>
                   <a:srgbClr val="FFFFFF"/>
                 </a:solidFill>
                 <a:latin typeface="Calibri" pitchFamily="34" charset="0"/>
+                <a:ea typeface="Amiri" pitchFamily="2" charset="-78"/>
                 <a:cs typeface="Amiri" pitchFamily="2" charset="-78"/>
               </a:rPr>
               <a:t>أَقْوَى وَتَدُومُ أَطْوَلَ</a:t>
@@ -8871,6 +8932,7 @@
                   <a:srgbClr val="D4AF37"/>
                 </a:solidFill>
                 <a:latin typeface="Amiri" pitchFamily="2" charset="-78"/>
+                <a:ea typeface="Amiri" pitchFamily="2" charset="-78"/>
                 <a:cs typeface="Amiri" pitchFamily="2" charset="-78"/>
               </a:rPr>
               <a:t>م</a:t>
@@ -9128,6 +9190,7 @@
                   <a:srgbClr val="8A6D1E"/>
                 </a:solidFill>
                 <a:latin typeface="Amiri" pitchFamily="2" charset="-78"/>
+                <a:ea typeface="Amiri" pitchFamily="2" charset="-78"/>
                 <a:cs typeface="Amiri" pitchFamily="2" charset="-78"/>
               </a:rPr>
               <a:t>أ</a:t>
@@ -9192,6 +9255,7 @@
                   <a:srgbClr val="1B3B6F"/>
                 </a:solidFill>
                 <a:latin typeface="Amiri" pitchFamily="2" charset="-78"/>
+                <a:ea typeface="Amiri" pitchFamily="2" charset="-78"/>
                 <a:cs typeface="Amiri" pitchFamily="2" charset="-78"/>
               </a:rPr>
               <a:t>أ</a:t>
@@ -9243,6 +9307,7 @@
                   <a:srgbClr val="8A6D1E"/>
                 </a:solidFill>
                 <a:latin typeface="Amiri" pitchFamily="2" charset="-78"/>
+                <a:ea typeface="Amiri" pitchFamily="2" charset="-78"/>
                 <a:cs typeface="Amiri" pitchFamily="2" charset="-78"/>
               </a:rPr>
               <a:t>نَمُوذَجُ الإِجَابَةِ</a:t>
@@ -9356,6 +9421,7 @@
                   <a:srgbClr val="1F2A37"/>
                 </a:solidFill>
                 <a:latin typeface="Amiri" pitchFamily="2" charset="-78"/>
+                <a:ea typeface="Amiri" pitchFamily="2" charset="-78"/>
                 <a:cs typeface="Amiri" pitchFamily="2" charset="-78"/>
               </a:rPr>
               <a:t>يُقَالُ إِنَّ الأَشْيَاءَ تَحْكِي قِصَصَ أَصْحَابِهَا، وَهٰذَا صَحِيحٌ فِي غُرْفَتِي؛ فَكُلُّ قِطْعَةٍ فِيهَا تَحْمِلُ ذِكْرَى. أَوَّلُهَا مَكْتَبٌ خَشَبِيٌّ قَدِيمٌ، طُولُهُ مِتْرٌ وَنِصْفٌ، كَانَ لِأَبِي عِنْدَمَا كَانَ طَالِبًا، وَمَا زَالَتْ آثَارُ أَقْلَامِهِ مَحْفُورَةً عَلَى سَطْحِهِ.</a:t>
@@ -9375,6 +9441,7 @@
                   <a:srgbClr val="1F2A37"/>
                 </a:solidFill>
                 <a:latin typeface="Amiri" pitchFamily="2" charset="-78"/>
+                <a:ea typeface="Amiri" pitchFamily="2" charset="-78"/>
                 <a:cs typeface="Amiri" pitchFamily="2" charset="-78"/>
               </a:rPr>
               <a:t>أَمَّا أَغْلَى مَا أَمْلِكُ فَهُوَ سَاعَةٌ دَائِرِيَّةٌ مَصْنُوعَةٌ مِنَ الفِضَّةِ، أَهْدَاهَا لِي جَدِّي قَبْلَ وَفَاتِهِ؛ وَمَعَ أَنَّهَا تَتَأَخَّرُ خَمْسَ دَقَائِقَ كُلَّ يَوْمٍ، فَإِنِّي لَا أَسْتَطِيعُ أَنْ أَسْتَبْدِلَهَا بِأَيِّ سَاعَةٍ ذَكِيَّةٍ.</a:t>
@@ -9394,6 +9461,7 @@
                   <a:srgbClr val="1F2A37"/>
                 </a:solidFill>
                 <a:latin typeface="Amiri" pitchFamily="2" charset="-78"/>
+                <a:ea typeface="Amiri" pitchFamily="2" charset="-78"/>
                 <a:cs typeface="Amiri" pitchFamily="2" charset="-78"/>
               </a:rPr>
               <a:t>وَقَدْ أَضَفْتُ إِلَى هٰذِهِ المَجْمُوعَةِ قِطْعَةً صَنَعْتُهَا بِيَدَيَّ فِي العَامِ المَاضِي: رَفًّا لِلْكُتُبِ مَصْنُوعًا مِنْ أَلْوَاحِ خَشَبٍ مُسْتَعْمَلَةٍ وَجَدْتُهَا فِي مَخْزَنِ المَدْرَسَةِ. قِسْتُ الجِدَارَ بِدِقَّةٍ، وَقَطَعْتُ الأَلْوَاحَ، ثُمَّ دَهَنْتُهَا بِاللَّوْنِ الأَبْيَضِ، فَأَصْبَحَ الرَّفُّ أَجْمَلَ مِنْ أَيِّ رَفٍّ فِي المَحَلَّاتِ.</a:t>
@@ -9413,6 +9481,7 @@
                   <a:srgbClr val="1F2A37"/>
                 </a:solidFill>
                 <a:latin typeface="Amiri" pitchFamily="2" charset="-78"/>
+                <a:ea typeface="Amiri" pitchFamily="2" charset="-78"/>
                 <a:cs typeface="Amiri" pitchFamily="2" charset="-78"/>
               </a:rPr>
               <a:t>صَحِيحٌ أَنَّ الأَشْيَاءَ الحَدِيثَةَ أَخَفُّ وَأَرْخَصُ، غَيْرَ أَنَّهَا نَادِرًا مَا تَدُومُ أَوْ تَحْمِلُ قِيمَةً. وَلَوْ أَصْلَحْنَا أَشْيَاءَنَا بَدَلًا مِنْ رَمْيِهَا، لَوَفَّرْنَا المَالَ، وَحَافَظْنَا عَلَى ذِكْرَيَاتِنَا وَعَلَى البِيئَةِ مَعًا.</a:t>
@@ -9511,11 +9580,12 @@
               <a:buNone/>
             </a:pPr>
             <a:r>
-              <a:rPr lang="en-US" sz="950" b="1" dirty="0">
+              <a:rPr lang="ar-SA" sz="950" b="1" dirty="0">
                 <a:solidFill>
                   <a:srgbClr val="FFFFFF"/>
                 </a:solidFill>
                 <a:latin typeface="Calibri" pitchFamily="34" charset="0"/>
+                <a:ea typeface="Amiri" pitchFamily="2" charset="-78"/>
                 <a:cs typeface="Amiri" pitchFamily="2" charset="-78"/>
               </a:rPr>
               <a:t>يُقَالُ إِنَّ</a:t>
@@ -9576,11 +9646,12 @@
               <a:buNone/>
             </a:pPr>
             <a:r>
-              <a:rPr lang="en-US" sz="950" b="1" dirty="0">
+              <a:rPr lang="ar-SA" sz="950" b="1" dirty="0">
                 <a:solidFill>
                   <a:srgbClr val="FFFFFF"/>
                 </a:solidFill>
                 <a:latin typeface="Calibri" pitchFamily="34" charset="0"/>
+                <a:ea typeface="Amiri" pitchFamily="2" charset="-78"/>
                 <a:cs typeface="Amiri" pitchFamily="2" charset="-78"/>
               </a:rPr>
               <a:t>مَا زَالَتْ آثَارُ</a:t>
@@ -9641,11 +9712,12 @@
               <a:buNone/>
             </a:pPr>
             <a:r>
-              <a:rPr lang="en-US" sz="950" b="1" dirty="0">
+              <a:rPr lang="ar-SA" sz="950" b="1" dirty="0">
                 <a:solidFill>
                   <a:srgbClr val="FFFFFF"/>
                 </a:solidFill>
                 <a:latin typeface="Calibri" pitchFamily="34" charset="0"/>
+                <a:ea typeface="Amiri" pitchFamily="2" charset="-78"/>
                 <a:cs typeface="Amiri" pitchFamily="2" charset="-78"/>
               </a:rPr>
               <a:t>مَعَ أَنَّهَا … فَإِنِّي</a:t>
@@ -9706,11 +9778,12 @@
               <a:buNone/>
             </a:pPr>
             <a:r>
-              <a:rPr lang="en-US" sz="950" b="1" dirty="0">
+              <a:rPr lang="ar-SA" sz="950" b="1" dirty="0">
                 <a:solidFill>
                   <a:srgbClr val="FFFFFF"/>
                 </a:solidFill>
                 <a:latin typeface="Calibri" pitchFamily="34" charset="0"/>
+                <a:ea typeface="Amiri" pitchFamily="2" charset="-78"/>
                 <a:cs typeface="Amiri" pitchFamily="2" charset="-78"/>
               </a:rPr>
               <a:t>لَوْ أَصْلَحْنَا … لَوَفَّرْنَا</a:t>
@@ -9844,6 +9917,7 @@
                   <a:srgbClr val="D4AF37"/>
                 </a:solidFill>
                 <a:latin typeface="Amiri" pitchFamily="2" charset="-78"/>
+                <a:ea typeface="Amiri" pitchFamily="2" charset="-78"/>
                 <a:cs typeface="Amiri" pitchFamily="2" charset="-78"/>
               </a:rPr>
               <a:t>م</a:t>
@@ -10101,6 +10175,7 @@
                   <a:srgbClr val="8A6D1E"/>
                 </a:solidFill>
                 <a:latin typeface="Amiri" pitchFamily="2" charset="-78"/>
+                <a:ea typeface="Amiri" pitchFamily="2" charset="-78"/>
                 <a:cs typeface="Amiri" pitchFamily="2" charset="-78"/>
               </a:rPr>
               <a:t>ب</a:t>
@@ -10165,6 +10240,7 @@
                   <a:srgbClr val="1B3B6F"/>
                 </a:solidFill>
                 <a:latin typeface="Amiri" pitchFamily="2" charset="-78"/>
+                <a:ea typeface="Amiri" pitchFamily="2" charset="-78"/>
                 <a:cs typeface="Amiri" pitchFamily="2" charset="-78"/>
               </a:rPr>
               <a:t>ب</a:t>
@@ -10216,6 +10292,7 @@
                   <a:srgbClr val="8A6D1E"/>
                 </a:solidFill>
                 <a:latin typeface="Amiri" pitchFamily="2" charset="-78"/>
+                <a:ea typeface="Amiri" pitchFamily="2" charset="-78"/>
                 <a:cs typeface="Amiri" pitchFamily="2" charset="-78"/>
               </a:rPr>
               <a:t>نَمُوذَجُ الإِجَابَةِ</a:t>
@@ -10329,6 +10406,7 @@
                   <a:srgbClr val="1F2A37"/>
                 </a:solidFill>
                 <a:latin typeface="Amiri" pitchFamily="2" charset="-78"/>
+                <a:ea typeface="Amiri" pitchFamily="2" charset="-78"/>
                 <a:cs typeface="Amiri" pitchFamily="2" charset="-78"/>
               </a:rPr>
               <a:t>نَعِيشُ فِي عَصْرِ البْلَاسْتِيكِ؛ فَهُوَ فِي أَكْوَابِنَا وَمَلَابِسِنَا وَهَوَاتِفِنَا، بَلْ وَحَتَّى فِي المِيَاهِ الَّتِي نَشْرَبُهَا. فَهَلْ نَسْتَطِيعُ أَنْ نَسْتَبْدِلَهُ بِمَوَادَّ أَكْثَرَ احْتِرَامًا لِلطَّبِيعَةِ؟</a:t>
@@ -10348,6 +10426,7 @@
                   <a:srgbClr val="1F2A37"/>
                 </a:solidFill>
                 <a:latin typeface="Amiri" pitchFamily="2" charset="-78"/>
+                <a:ea typeface="Amiri" pitchFamily="2" charset="-78"/>
                 <a:cs typeface="Amiri" pitchFamily="2" charset="-78"/>
               </a:rPr>
               <a:t>فِي المَاضِي كَانَتِ الأَشْيَاءُ تُصْنَعُ مِنَ الخَشَبِ وَالزُّجَاجِ وَالقُطْنِ، وَكَانَتْ تُصْلَحُ وَتُورَثُ مِنْ جِيلٍ إِلَى جِيلٍ، أَمَّا اليَوْمَ فَيُفَضِّلُ المُصَنِّعُونَ البْلَاسْتِيكَ، لِأَنَّهُ أَخَفُّ وَأَرْخَصُ، مِمَّا جَعَلَ الأَشْيَاءَ تُرْمَى بَعْدَ اسْتِعْمَالٍ قَصِيرٍ، حَتَّى أَصْبَحَتِ النُّفَايَاتُ البْلَاسْتِيكِيَّةُ تَمْلَأُ البِحَارَ وَالشَّوَاطِئَ.</a:t>
@@ -10367,6 +10446,7 @@
                   <a:srgbClr val="1F2A37"/>
                 </a:solidFill>
                 <a:latin typeface="Amiri" pitchFamily="2" charset="-78"/>
+                <a:ea typeface="Amiri" pitchFamily="2" charset="-78"/>
                 <a:cs typeface="Amiri" pitchFamily="2" charset="-78"/>
               </a:rPr>
               <a:t>وَقَدْ شَارَكْتُ فِي تَجْرِبَةٍ عِلْمِيَّةٍ فِي المَدْرَسَةِ دَفَنَّا فِيهَا قِطَعًا مُتَسَاوِيَةً مِنَ الوَرَقِ وَالقُطْنِ وَالبْلَاسْتِيكِ فِي التُّرْبَةِ؛ وَبَعْدَ ثَلَاثَةِ أَشْهُرٍ، اخْتَفَى الوَرَقُ تَقْرِيبًا، وَتَحَلَّلَ نِصْفُ القُطْنِ، أَمَّا البْلَاسْتِيكُ فَبَقِيَ كَمَا هُوَ تَمَامًا، حَتَّى إِنَّ لَوْنَهُ لَمْ يَتَغَيَّرْ.</a:t>
@@ -10386,6 +10466,7 @@
                   <a:srgbClr val="1F2A37"/>
                 </a:solidFill>
                 <a:latin typeface="Amiri" pitchFamily="2" charset="-78"/>
+                <a:ea typeface="Amiri" pitchFamily="2" charset="-78"/>
                 <a:cs typeface="Amiri" pitchFamily="2" charset="-78"/>
               </a:rPr>
               <a:t>صَحِيحٌ أَنَّ المَوَادَّ الطَّبِيعِيَّةَ أَغْلَى أَحْيَانًا، غَيْرَ أَنَّ ثَمَنَ البْلَاسْتِيكِ الحَقِيقِيَّ تَدْفَعُهُ الأَجْيَالُ القَادِمَةُ. وَإِذَا دَعَمَتِ الحُكُومَاتُ الشَّرِكَاتِ الَّتِي تَسْتَخْدِمُ مَوَادَّ قَابِلَةً لِلتَّحَلُّلِ، فَسَتُصْبِحُ هٰذِهِ المَوَادُّ أَرْخَصَ وَفِي مُتَنَاوَلِ الجَمِيعِ، فِي كُلِّ بَيْتٍ وَمَدْرَسَةٍ.</a:t>
@@ -10484,11 +10565,12 @@
               <a:buNone/>
             </a:pPr>
             <a:r>
-              <a:rPr lang="en-US" sz="950" b="1" dirty="0">
+              <a:rPr lang="ar-SA" sz="950" b="1" dirty="0">
                 <a:solidFill>
                   <a:srgbClr val="FFFFFF"/>
                 </a:solidFill>
                 <a:latin typeface="Calibri" pitchFamily="34" charset="0"/>
+                <a:ea typeface="Amiri" pitchFamily="2" charset="-78"/>
                 <a:cs typeface="Amiri" pitchFamily="2" charset="-78"/>
               </a:rPr>
               <a:t>بَلْ وَحَتَّى</a:t>
@@ -10549,11 +10631,12 @@
               <a:buNone/>
             </a:pPr>
             <a:r>
-              <a:rPr lang="en-US" sz="950" b="1" dirty="0">
+              <a:rPr lang="ar-SA" sz="950" b="1" dirty="0">
                 <a:solidFill>
                   <a:srgbClr val="FFFFFF"/>
                 </a:solidFill>
                 <a:latin typeface="Calibri" pitchFamily="34" charset="0"/>
+                <a:ea typeface="Amiri" pitchFamily="2" charset="-78"/>
                 <a:cs typeface="Amiri" pitchFamily="2" charset="-78"/>
               </a:rPr>
               <a:t>كَانَتِ الأَشْيَاءُ تُصْنَعُ</a:t>
@@ -10614,11 +10697,12 @@
               <a:buNone/>
             </a:pPr>
             <a:r>
-              <a:rPr lang="en-US" sz="950" b="1" dirty="0">
+              <a:rPr lang="ar-SA" sz="950" b="1" dirty="0">
                 <a:solidFill>
                   <a:srgbClr val="FFFFFF"/>
                 </a:solidFill>
                 <a:latin typeface="Calibri" pitchFamily="34" charset="0"/>
+                <a:ea typeface="Amiri" pitchFamily="2" charset="-78"/>
                 <a:cs typeface="Amiri" pitchFamily="2" charset="-78"/>
               </a:rPr>
               <a:t>أَمَّا البْلَاسْتِيكُ فَبَقِيَ</a:t>
@@ -10679,11 +10763,12 @@
               <a:buNone/>
             </a:pPr>
             <a:r>
-              <a:rPr lang="en-US" sz="950" b="1" dirty="0">
+              <a:rPr lang="ar-SA" sz="950" b="1" dirty="0">
                 <a:solidFill>
                   <a:srgbClr val="FFFFFF"/>
                 </a:solidFill>
                 <a:latin typeface="Calibri" pitchFamily="34" charset="0"/>
+                <a:ea typeface="Amiri" pitchFamily="2" charset="-78"/>
                 <a:cs typeface="Amiri" pitchFamily="2" charset="-78"/>
               </a:rPr>
               <a:t>إِذَا دَعَمَتْ … فَسَتُصْبِحُ</a:t>
@@ -10817,6 +10902,7 @@
                   <a:srgbClr val="D4AF37"/>
                 </a:solidFill>
                 <a:latin typeface="Amiri" pitchFamily="2" charset="-78"/>
+                <a:ea typeface="Amiri" pitchFamily="2" charset="-78"/>
                 <a:cs typeface="Amiri" pitchFamily="2" charset="-78"/>
               </a:rPr>
               <a:t>م</a:t>
@@ -11137,6 +11223,7 @@
                   <a:srgbClr val="8A6D1E"/>
                 </a:solidFill>
                 <a:latin typeface="Amiri" pitchFamily="2" charset="-78"/>
+                <a:ea typeface="Amiri" pitchFamily="2" charset="-78"/>
                 <a:cs typeface="Amiri" pitchFamily="2" charset="-78"/>
               </a:rPr>
               <a:t>قَيِّمْ عَمَلَكَ</a:t>
@@ -12381,6 +12468,7 @@
                   <a:srgbClr val="FFFFFF"/>
                 </a:solidFill>
                 <a:latin typeface="Amiri" pitchFamily="2" charset="-78"/>
+                <a:ea typeface="Amiri" pitchFamily="2" charset="-78"/>
                 <a:cs typeface="Amiri" pitchFamily="2" charset="-78"/>
               </a:rPr>
               <a:t>أَحْسَنْتُمْ! إِلَى اللِّقَاءِ</a:t>
@@ -12533,6 +12621,7 @@
                   <a:srgbClr val="D4AF37"/>
                 </a:solidFill>
                 <a:latin typeface="Amiri" pitchFamily="2" charset="-78"/>
+                <a:ea typeface="Amiri" pitchFamily="2" charset="-78"/>
                 <a:cs typeface="Amiri" pitchFamily="2" charset="-78"/>
               </a:rPr>
               <a:t>وَرْشَةُ التَّدْرِيبِ</a:t>
@@ -12666,6 +12755,7 @@
                   <a:srgbClr val="D4AF37"/>
                 </a:solidFill>
                 <a:latin typeface="Amiri" pitchFamily="2" charset="-78"/>
+                <a:ea typeface="Amiri" pitchFamily="2" charset="-78"/>
                 <a:cs typeface="Amiri" pitchFamily="2" charset="-78"/>
               </a:rPr>
               <a:t>م</a:t>
@@ -12986,6 +13076,7 @@
                   <a:srgbClr val="8A6D1E"/>
                 </a:solidFill>
                 <a:latin typeface="Amiri" pitchFamily="2" charset="-78"/>
+                <a:ea typeface="Amiri" pitchFamily="2" charset="-78"/>
                 <a:cs typeface="Amiri" pitchFamily="2" charset="-78"/>
               </a:rPr>
               <a:t>آدَابُ الصَّفِّ</a:t>
@@ -14517,6 +14608,7 @@
                   <a:srgbClr val="D4AF37"/>
                 </a:solidFill>
                 <a:latin typeface="Amiri" pitchFamily="2" charset="-78"/>
+                <a:ea typeface="Amiri" pitchFamily="2" charset="-78"/>
                 <a:cs typeface="Amiri" pitchFamily="2" charset="-78"/>
               </a:rPr>
               <a:t>م</a:t>
@@ -14837,6 +14929,7 @@
                   <a:srgbClr val="8A6D1E"/>
                 </a:solidFill>
                 <a:latin typeface="Amiri" pitchFamily="2" charset="-78"/>
+                <a:ea typeface="Amiri" pitchFamily="2" charset="-78"/>
                 <a:cs typeface="Amiri" pitchFamily="2" charset="-78"/>
               </a:rPr>
               <a:t>خَرِيطَةُ الوَرْشَةِ</a:t>
@@ -15151,6 +15244,7 @@
                   <a:srgbClr val="1B3B6F"/>
                 </a:solidFill>
                 <a:latin typeface="Amiri" pitchFamily="2" charset="-78"/>
+                <a:ea typeface="Amiri" pitchFamily="2" charset="-78"/>
                 <a:cs typeface="Amiri" pitchFamily="2" charset="-78"/>
               </a:rPr>
               <a:t>كَيْفَ</a:t>
@@ -15427,6 +15521,7 @@
                   <a:srgbClr val="1E6B52"/>
                 </a:solidFill>
                 <a:latin typeface="Amiri" pitchFamily="2" charset="-78"/>
+                <a:ea typeface="Amiri" pitchFamily="2" charset="-78"/>
                 <a:cs typeface="Amiri" pitchFamily="2" charset="-78"/>
               </a:rPr>
               <a:t>الاسْتِمَارَةُ</a:t>
@@ -15703,6 +15798,7 @@
                   <a:srgbClr val="1E6B52"/>
                 </a:solidFill>
                 <a:latin typeface="Amiri" pitchFamily="2" charset="-78"/>
+                <a:ea typeface="Amiri" pitchFamily="2" charset="-78"/>
                 <a:cs typeface="Amiri" pitchFamily="2" charset="-78"/>
               </a:rPr>
               <a:t>الرِّسَالَةُ</a:t>
@@ -15979,6 +16075,7 @@
                   <a:srgbClr val="1E6B52"/>
                 </a:solidFill>
                 <a:latin typeface="Amiri" pitchFamily="2" charset="-78"/>
+                <a:ea typeface="Amiri" pitchFamily="2" charset="-78"/>
                 <a:cs typeface="Amiri" pitchFamily="2" charset="-78"/>
               </a:rPr>
               <a:t>المَقَالُ</a:t>
@@ -16255,6 +16352,7 @@
                   <a:srgbClr val="8A6D1E"/>
                 </a:solidFill>
                 <a:latin typeface="Amiri" pitchFamily="2" charset="-78"/>
+                <a:ea typeface="Amiri" pitchFamily="2" charset="-78"/>
                 <a:cs typeface="Amiri" pitchFamily="2" charset="-78"/>
               </a:rPr>
               <a:t>قَيِّمْ</a:t>
@@ -16498,6 +16596,7 @@
                   <a:srgbClr val="D4AF37"/>
                 </a:solidFill>
                 <a:latin typeface="Amiri" pitchFamily="2" charset="-78"/>
+                <a:ea typeface="Amiri" pitchFamily="2" charset="-78"/>
                 <a:cs typeface="Amiri" pitchFamily="2" charset="-78"/>
               </a:rPr>
               <a:t>م</a:t>
@@ -16818,6 +16917,7 @@
                   <a:srgbClr val="8A6D1E"/>
                 </a:solidFill>
                 <a:latin typeface="Amiri" pitchFamily="2" charset="-78"/>
+                <a:ea typeface="Amiri" pitchFamily="2" charset="-78"/>
                 <a:cs typeface="Amiri" pitchFamily="2" charset="-78"/>
               </a:rPr>
               <a:t>امْتِحَانُ الكِتَابَةِ</a:t>
@@ -17442,6 +17542,7 @@
                   <a:srgbClr val="1B3B6F"/>
                 </a:solidFill>
                 <a:latin typeface="Amiri" pitchFamily="2" charset="-78"/>
+                <a:ea typeface="Amiri" pitchFamily="2" charset="-78"/>
                 <a:cs typeface="Amiri" pitchFamily="2" charset="-78"/>
               </a:rPr>
               <a:t>حَقِيبَةٌ جِلْدِيَّةٌ زَرْقَاءُ، مُسْتَطِيلَةُ الشَّكْلِ</a:t>
@@ -17541,6 +17642,7 @@
                   <a:srgbClr val="1B3B6F"/>
                 </a:solidFill>
                 <a:latin typeface="Amiri" pitchFamily="2" charset="-78"/>
+                <a:ea typeface="Amiri" pitchFamily="2" charset="-78"/>
                 <a:cs typeface="Amiri" pitchFamily="2" charset="-78"/>
               </a:rPr>
               <a:t>طُولُهَا نَحْوُ ثَلَاثِينَ سَنْتِيمِتْرًا</a:t>
@@ -17640,6 +17742,7 @@
                   <a:srgbClr val="1B3B6F"/>
                 </a:solidFill>
                 <a:latin typeface="Amiri" pitchFamily="2" charset="-78"/>
+                <a:ea typeface="Amiri" pitchFamily="2" charset="-78"/>
                 <a:cs typeface="Amiri" pitchFamily="2" charset="-78"/>
               </a:rPr>
               <a:t>سَاعَةٌ دَائِرِيَّةٌ مَصْنُوعَةٌ مِنَ الفِضَّةِ</a:t>
@@ -17811,6 +17914,7 @@
                   <a:srgbClr val="D4AF37"/>
                 </a:solidFill>
                 <a:latin typeface="Amiri" pitchFamily="2" charset="-78"/>
+                <a:ea typeface="Amiri" pitchFamily="2" charset="-78"/>
                 <a:cs typeface="Amiri" pitchFamily="2" charset="-78"/>
               </a:rPr>
               <a:t>م</a:t>
@@ -18131,6 +18235,7 @@
                   <a:srgbClr val="8A6D1E"/>
                 </a:solidFill>
                 <a:latin typeface="Amiri" pitchFamily="2" charset="-78"/>
+                <a:ea typeface="Amiri" pitchFamily="2" charset="-78"/>
                 <a:cs typeface="Amiri" pitchFamily="2" charset="-78"/>
               </a:rPr>
               <a:t>اسْتِمَارَةُ الإِبْلَاغِ عَنْ أَمْتِعَةٍ مَفْقُودَةٍ</a:t>
@@ -18487,6 +18592,7 @@
                   <a:srgbClr val="1B3B6F"/>
                 </a:solidFill>
                 <a:latin typeface="Amiri" pitchFamily="2" charset="-78"/>
+                <a:ea typeface="Amiri" pitchFamily="2" charset="-78"/>
                 <a:cs typeface="Amiri" pitchFamily="2" charset="-78"/>
               </a:rPr>
               <a:t>الاسْمُ</a:t>
@@ -18731,6 +18837,7 @@
                   <a:srgbClr val="1B3B6F"/>
                 </a:solidFill>
                 <a:latin typeface="Amiri" pitchFamily="2" charset="-78"/>
+                <a:ea typeface="Amiri" pitchFamily="2" charset="-78"/>
                 <a:cs typeface="Amiri" pitchFamily="2" charset="-78"/>
               </a:rPr>
               <a:t>رَقْمُ الرِّحْلَةِ</a:t>
@@ -18975,6 +19082,7 @@
                   <a:srgbClr val="1B3B6F"/>
                 </a:solidFill>
                 <a:latin typeface="Amiri" pitchFamily="2" charset="-78"/>
+                <a:ea typeface="Amiri" pitchFamily="2" charset="-78"/>
                 <a:cs typeface="Amiri" pitchFamily="2" charset="-78"/>
               </a:rPr>
               <a:t>نَوْعُ الشَّيْءِ المَفْقُودِ</a:t>
@@ -19219,6 +19327,7 @@
                   <a:srgbClr val="1B3B6F"/>
                 </a:solidFill>
                 <a:latin typeface="Amiri" pitchFamily="2" charset="-78"/>
+                <a:ea typeface="Amiri" pitchFamily="2" charset="-78"/>
                 <a:cs typeface="Amiri" pitchFamily="2" charset="-78"/>
               </a:rPr>
               <a:t>اللَّوْنُ</a:t>
@@ -19463,6 +19572,7 @@
                   <a:srgbClr val="1B3B6F"/>
                 </a:solidFill>
                 <a:latin typeface="Amiri" pitchFamily="2" charset="-78"/>
+                <a:ea typeface="Amiri" pitchFamily="2" charset="-78"/>
                 <a:cs typeface="Amiri" pitchFamily="2" charset="-78"/>
               </a:rPr>
               <a:t>المَادَّةُ</a:t>
@@ -19707,6 +19817,7 @@
                   <a:srgbClr val="1B3B6F"/>
                 </a:solidFill>
                 <a:latin typeface="Amiri" pitchFamily="2" charset="-78"/>
+                <a:ea typeface="Amiri" pitchFamily="2" charset="-78"/>
                 <a:cs typeface="Amiri" pitchFamily="2" charset="-78"/>
               </a:rPr>
               <a:t>الشَّكْلُ</a:t>
@@ -19951,6 +20062,7 @@
                   <a:srgbClr val="1B3B6F"/>
                 </a:solidFill>
                 <a:latin typeface="Amiri" pitchFamily="2" charset="-78"/>
+                <a:ea typeface="Amiri" pitchFamily="2" charset="-78"/>
                 <a:cs typeface="Amiri" pitchFamily="2" charset="-78"/>
               </a:rPr>
               <a:t>المَقَاسُ أَوِ الوَزْنُ</a:t>
@@ -20130,6 +20242,7 @@
                   <a:srgbClr val="1B3B6F"/>
                 </a:solidFill>
                 <a:latin typeface="Amiri" pitchFamily="2" charset="-78"/>
+                <a:ea typeface="Amiri" pitchFamily="2" charset="-78"/>
                 <a:cs typeface="Amiri" pitchFamily="2" charset="-78"/>
               </a:rPr>
               <a:t>جُمْلَةٌ: مَا الَّذِي كَانَ فِيهَا؟</a:t>
@@ -20339,6 +20452,7 @@
                   <a:srgbClr val="D4AF37"/>
                 </a:solidFill>
                 <a:latin typeface="Amiri" pitchFamily="2" charset="-78"/>
+                <a:ea typeface="Amiri" pitchFamily="2" charset="-78"/>
                 <a:cs typeface="Amiri" pitchFamily="2" charset="-78"/>
               </a:rPr>
               <a:t>م</a:t>
@@ -20659,6 +20773,7 @@
                   <a:srgbClr val="8A6D1E"/>
                 </a:solidFill>
                 <a:latin typeface="Amiri" pitchFamily="2" charset="-78"/>
+                <a:ea typeface="Amiri" pitchFamily="2" charset="-78"/>
                 <a:cs typeface="Amiri" pitchFamily="2" charset="-78"/>
               </a:rPr>
               <a:t>نَمُوذَجُ الإِجَابَةِ</a:t>
@@ -20977,6 +21092,7 @@
                   <a:srgbClr val="1B3B6F"/>
                 </a:solidFill>
                 <a:latin typeface="Amiri" pitchFamily="2" charset="-78"/>
+                <a:ea typeface="Amiri" pitchFamily="2" charset="-78"/>
                 <a:cs typeface="Amiri" pitchFamily="2" charset="-78"/>
               </a:rPr>
               <a:t>آدَمُ يُوسُفُ</a:t>
@@ -21015,6 +21131,7 @@
                   <a:srgbClr val="1B3B6F"/>
                 </a:solidFill>
                 <a:latin typeface="Amiri" pitchFamily="2" charset="-78"/>
+                <a:ea typeface="Amiri" pitchFamily="2" charset="-78"/>
                 <a:cs typeface="Amiri" pitchFamily="2" charset="-78"/>
               </a:rPr>
               <a:t>الاسْمُ</a:t>
@@ -21156,6 +21273,7 @@
                   <a:srgbClr val="1B3B6F"/>
                 </a:solidFill>
                 <a:latin typeface="Amiri" pitchFamily="2" charset="-78"/>
+                <a:ea typeface="Amiri" pitchFamily="2" charset="-78"/>
                 <a:cs typeface="Amiri" pitchFamily="2" charset="-78"/>
               </a:rPr>
               <a:t>٢٠٤</a:t>
@@ -21194,6 +21312,7 @@
                   <a:srgbClr val="1B3B6F"/>
                 </a:solidFill>
                 <a:latin typeface="Amiri" pitchFamily="2" charset="-78"/>
+                <a:ea typeface="Amiri" pitchFamily="2" charset="-78"/>
                 <a:cs typeface="Amiri" pitchFamily="2" charset="-78"/>
               </a:rPr>
               <a:t>رَقْمُ الرِّحْلَةِ</a:t>
@@ -21335,6 +21454,7 @@
                   <a:srgbClr val="1B3B6F"/>
                 </a:solidFill>
                 <a:latin typeface="Amiri" pitchFamily="2" charset="-78"/>
+                <a:ea typeface="Amiri" pitchFamily="2" charset="-78"/>
                 <a:cs typeface="Amiri" pitchFamily="2" charset="-78"/>
               </a:rPr>
               <a:t>حَقِيبَةُ يَدٍ</a:t>
@@ -21373,6 +21493,7 @@
                   <a:srgbClr val="1B3B6F"/>
                 </a:solidFill>
                 <a:latin typeface="Amiri" pitchFamily="2" charset="-78"/>
+                <a:ea typeface="Amiri" pitchFamily="2" charset="-78"/>
                 <a:cs typeface="Amiri" pitchFamily="2" charset="-78"/>
               </a:rPr>
               <a:t>نَوْعُ الشَّيْءِ المَفْقُودِ</a:t>
@@ -21514,6 +21635,7 @@
                   <a:srgbClr val="1B3B6F"/>
                 </a:solidFill>
                 <a:latin typeface="Amiri" pitchFamily="2" charset="-78"/>
+                <a:ea typeface="Amiri" pitchFamily="2" charset="-78"/>
                 <a:cs typeface="Amiri" pitchFamily="2" charset="-78"/>
               </a:rPr>
               <a:t>أَزْرَقُ دَاكِنٌ</a:t>
@@ -21552,6 +21674,7 @@
                   <a:srgbClr val="1B3B6F"/>
                 </a:solidFill>
                 <a:latin typeface="Amiri" pitchFamily="2" charset="-78"/>
+                <a:ea typeface="Amiri" pitchFamily="2" charset="-78"/>
                 <a:cs typeface="Amiri" pitchFamily="2" charset="-78"/>
               </a:rPr>
               <a:t>اللَّوْنُ</a:t>
@@ -21693,6 +21816,7 @@
                   <a:srgbClr val="1B3B6F"/>
                 </a:solidFill>
                 <a:latin typeface="Amiri" pitchFamily="2" charset="-78"/>
+                <a:ea typeface="Amiri" pitchFamily="2" charset="-78"/>
                 <a:cs typeface="Amiri" pitchFamily="2" charset="-78"/>
               </a:rPr>
               <a:t>الجِلْدُ</a:t>
@@ -21731,6 +21855,7 @@
                   <a:srgbClr val="1B3B6F"/>
                 </a:solidFill>
                 <a:latin typeface="Amiri" pitchFamily="2" charset="-78"/>
+                <a:ea typeface="Amiri" pitchFamily="2" charset="-78"/>
                 <a:cs typeface="Amiri" pitchFamily="2" charset="-78"/>
               </a:rPr>
               <a:t>المَادَّةُ</a:t>
@@ -21872,6 +21997,7 @@
                   <a:srgbClr val="1B3B6F"/>
                 </a:solidFill>
                 <a:latin typeface="Amiri" pitchFamily="2" charset="-78"/>
+                <a:ea typeface="Amiri" pitchFamily="2" charset="-78"/>
                 <a:cs typeface="Amiri" pitchFamily="2" charset="-78"/>
               </a:rPr>
               <a:t>مُسْتَطِيلٌ</a:t>
@@ -21910,6 +22036,7 @@
                   <a:srgbClr val="1B3B6F"/>
                 </a:solidFill>
                 <a:latin typeface="Amiri" pitchFamily="2" charset="-78"/>
+                <a:ea typeface="Amiri" pitchFamily="2" charset="-78"/>
                 <a:cs typeface="Amiri" pitchFamily="2" charset="-78"/>
               </a:rPr>
               <a:t>الشَّكْلُ</a:t>
@@ -22051,6 +22178,7 @@
                   <a:srgbClr val="1B3B6F"/>
                 </a:solidFill>
                 <a:latin typeface="Amiri" pitchFamily="2" charset="-78"/>
+                <a:ea typeface="Amiri" pitchFamily="2" charset="-78"/>
                 <a:cs typeface="Amiri" pitchFamily="2" charset="-78"/>
               </a:rPr>
               <a:t>طُولُهَا ثَلَاثُونَ سَنْتِيمِتْرًا</a:t>
@@ -22089,6 +22217,7 @@
                   <a:srgbClr val="1B3B6F"/>
                 </a:solidFill>
                 <a:latin typeface="Amiri" pitchFamily="2" charset="-78"/>
+                <a:ea typeface="Amiri" pitchFamily="2" charset="-78"/>
                 <a:cs typeface="Amiri" pitchFamily="2" charset="-78"/>
               </a:rPr>
               <a:t>المَقَاسُ أَوِ الوَزْنُ</a:t>
@@ -22230,6 +22359,7 @@
                   <a:srgbClr val="1B3B6F"/>
                 </a:solidFill>
                 <a:latin typeface="Amiri" pitchFamily="2" charset="-78"/>
+                <a:ea typeface="Amiri" pitchFamily="2" charset="-78"/>
                 <a:cs typeface="Amiri" pitchFamily="2" charset="-78"/>
               </a:rPr>
               <a:t>كَانَ فِيهَا حَاسُوبٌ فِضِّيٌّ وَكِتَابَانِ مَدْرَسِيَّانِ.</a:t>
@@ -22268,6 +22398,7 @@
                   <a:srgbClr val="1B3B6F"/>
                 </a:solidFill>
                 <a:latin typeface="Amiri" pitchFamily="2" charset="-78"/>
+                <a:ea typeface="Amiri" pitchFamily="2" charset="-78"/>
                 <a:cs typeface="Amiri" pitchFamily="2" charset="-78"/>
               </a:rPr>
               <a:t>جُمْلَةٌ: مَا الَّذِي كَانَ فِيهَا؟</a:t>
@@ -22477,6 +22608,7 @@
                   <a:srgbClr val="D4AF37"/>
                 </a:solidFill>
                 <a:latin typeface="Amiri" pitchFamily="2" charset="-78"/>
+                <a:ea typeface="Amiri" pitchFamily="2" charset="-78"/>
                 <a:cs typeface="Amiri" pitchFamily="2" charset="-78"/>
               </a:rPr>
               <a:t>م</a:t>
@@ -22797,6 +22929,7 @@
                   <a:srgbClr val="8A6D1E"/>
                 </a:solidFill>
                 <a:latin typeface="Amiri" pitchFamily="2" charset="-78"/>
+                <a:ea typeface="Amiri" pitchFamily="2" charset="-78"/>
                 <a:cs typeface="Amiri" pitchFamily="2" charset="-78"/>
               </a:rPr>
               <a:t>حَقِيبَةٌ مَفْقُودَةٌ</a:t>
@@ -23272,6 +23405,7 @@
                   <a:srgbClr val="1B3B6F"/>
                 </a:solidFill>
                 <a:latin typeface="Amiri" pitchFamily="2" charset="-78"/>
+                <a:ea typeface="Amiri" pitchFamily="2" charset="-78"/>
                 <a:cs typeface="Amiri" pitchFamily="2" charset="-78"/>
               </a:rPr>
               <a:t>أَمْسِ نَسِيتُ … فِي …</a:t>
@@ -23348,6 +23482,7 @@
                   <a:srgbClr val="1B3B6F"/>
                 </a:solidFill>
                 <a:latin typeface="Amiri" pitchFamily="2" charset="-78"/>
+                <a:ea typeface="Amiri" pitchFamily="2" charset="-78"/>
                 <a:cs typeface="Amiri" pitchFamily="2" charset="-78"/>
               </a:rPr>
               <a:t>هِيَ … وَمَصْنُوعَةٌ مِنْ … طُولُهَا …</a:t>
@@ -23424,6 +23559,7 @@
                   <a:srgbClr val="1B3B6F"/>
                 </a:solidFill>
                 <a:latin typeface="Amiri" pitchFamily="2" charset="-78"/>
+                <a:ea typeface="Amiri" pitchFamily="2" charset="-78"/>
                 <a:cs typeface="Amiri" pitchFamily="2" charset="-78"/>
               </a:rPr>
               <a:t>فِيهَا … وَهِيَ مُهِمَّةٌ لِأَنَّ …</a:t>
@@ -23500,6 +23636,7 @@
                   <a:srgbClr val="1B3B6F"/>
                 </a:solidFill>
                 <a:latin typeface="Amiri" pitchFamily="2" charset="-78"/>
+                <a:ea typeface="Amiri" pitchFamily="2" charset="-78"/>
                 <a:cs typeface="Amiri" pitchFamily="2" charset="-78"/>
               </a:rPr>
               <a:t>أَرْجُو أَنْ تَتَّصِلُوا بِي … سَأَكُونُ …</a:t>
@@ -23671,6 +23808,7 @@
                   <a:srgbClr val="D4AF37"/>
                 </a:solidFill>
                 <a:latin typeface="Amiri" pitchFamily="2" charset="-78"/>
+                <a:ea typeface="Amiri" pitchFamily="2" charset="-78"/>
                 <a:cs typeface="Amiri" pitchFamily="2" charset="-78"/>
               </a:rPr>
               <a:t>م</a:t>
@@ -23991,6 +24129,7 @@
                   <a:srgbClr val="8A6D1E"/>
                 </a:solidFill>
                 <a:latin typeface="Amiri" pitchFamily="2" charset="-78"/>
+                <a:ea typeface="Amiri" pitchFamily="2" charset="-78"/>
                 <a:cs typeface="Amiri" pitchFamily="2" charset="-78"/>
               </a:rPr>
               <a:t>نَصُّ السُّؤَالِ</a:t>
@@ -24271,6 +24410,7 @@
                   <a:srgbClr val="1B3B6F"/>
                 </a:solidFill>
                 <a:latin typeface="Amiri" pitchFamily="2" charset="-78"/>
+                <a:ea typeface="Amiri" pitchFamily="2" charset="-78"/>
                 <a:cs typeface="Amiri" pitchFamily="2" charset="-78"/>
               </a:rPr>
               <a:t>نَسِيتَ حَقِيبَةً فِي الطَّائِرَةِ. اكْتُبْ رِسَالَةً إِلَى مَكْتَبِ المَفْقُودَاتِ (٨٠–٩٠ كَلِمَةً).</a:t>
@@ -24412,6 +24552,7 @@
                   <a:srgbClr val="1B3B6F"/>
                 </a:solidFill>
                 <a:latin typeface="Amiri" pitchFamily="2" charset="-78"/>
+                <a:ea typeface="Amiri" pitchFamily="2" charset="-78"/>
                 <a:cs typeface="Amiri" pitchFamily="2" charset="-78"/>
               </a:rPr>
               <a:t>مَتَى وَأَيْنَ فَقَدْتَهَا؟</a:t>
@@ -24553,6 +24694,7 @@
                   <a:srgbClr val="1B3B6F"/>
                 </a:solidFill>
                 <a:latin typeface="Amiri" pitchFamily="2" charset="-78"/>
+                <a:ea typeface="Amiri" pitchFamily="2" charset="-78"/>
                 <a:cs typeface="Amiri" pitchFamily="2" charset="-78"/>
               </a:rPr>
               <a:t>صِفِ الحَقِيبَةَ بِدِقَّةٍ.</a:t>
@@ -24694,6 +24836,7 @@
                   <a:srgbClr val="1B3B6F"/>
                 </a:solidFill>
                 <a:latin typeface="Amiri" pitchFamily="2" charset="-78"/>
+                <a:ea typeface="Amiri" pitchFamily="2" charset="-78"/>
                 <a:cs typeface="Amiri" pitchFamily="2" charset="-78"/>
               </a:rPr>
               <a:t>مَاذَا كَانَ فِيهَا؟ وَلِمَاذَا هِيَ مُهِمَّةٌ؟</a:t>
@@ -24835,6 +24978,7 @@
                   <a:srgbClr val="1B3B6F"/>
                 </a:solidFill>
                 <a:latin typeface="Amiri" pitchFamily="2" charset="-78"/>
+                <a:ea typeface="Amiri" pitchFamily="2" charset="-78"/>
                 <a:cs typeface="Amiri" pitchFamily="2" charset="-78"/>
               </a:rPr>
               <a:t>مَاذَا تُرِيدُ مِنْهُمْ؟ وَمَتَى سَتَكُونُ مُتَاحًا؟</a:t>
@@ -25044,6 +25188,7 @@
                   <a:srgbClr val="D4AF37"/>
                 </a:solidFill>
                 <a:latin typeface="Amiri" pitchFamily="2" charset="-78"/>
+                <a:ea typeface="Amiri" pitchFamily="2" charset="-78"/>
                 <a:cs typeface="Amiri" pitchFamily="2" charset="-78"/>
               </a:rPr>
               <a:t>م</a:t>
@@ -25364,6 +25509,7 @@
                   <a:srgbClr val="8A6D1E"/>
                 </a:solidFill>
                 <a:latin typeface="Amiri" pitchFamily="2" charset="-78"/>
+                <a:ea typeface="Amiri" pitchFamily="2" charset="-78"/>
                 <a:cs typeface="Amiri" pitchFamily="2" charset="-78"/>
               </a:rPr>
               <a:t>قَوَالِبُ الكِتَابَةِ</a:t>
@@ -25644,6 +25790,7 @@
                   <a:srgbClr val="1B3B6F"/>
                 </a:solidFill>
                 <a:latin typeface="Amiri" pitchFamily="2" charset="-78"/>
+                <a:ea typeface="Amiri" pitchFamily="2" charset="-78"/>
                 <a:cs typeface="Amiri" pitchFamily="2" charset="-78"/>
               </a:rPr>
               <a:t>إِلَى مَكْتَبِ المَفْقُودَاتِ،</a:t>
@@ -25850,6 +25997,7 @@
                   <a:srgbClr val="1B3B6F"/>
                 </a:solidFill>
                 <a:latin typeface="Amiri" pitchFamily="2" charset="-78"/>
+                <a:ea typeface="Amiri" pitchFamily="2" charset="-78"/>
                 <a:cs typeface="Amiri" pitchFamily="2" charset="-78"/>
               </a:rPr>
               <a:t>أَمْسِ وَصَلْتُ مِنْ ______ ، وَنَسِيتُ حَقِيبَةً فِي ______ .</a:t>
@@ -26056,6 +26204,7 @@
                   <a:srgbClr val="1B3B6F"/>
                 </a:solidFill>
                 <a:latin typeface="Amiri" pitchFamily="2" charset="-78"/>
+                <a:ea typeface="Amiri" pitchFamily="2" charset="-78"/>
                 <a:cs typeface="Amiri" pitchFamily="2" charset="-78"/>
               </a:rPr>
               <a:t>الحَقِيبَةُ ______ ، وَمَصْنُوعَةٌ مِنْ ______ . شَكْلُهَا ______ ، وَطُولُهَا ______ .</a:t>
@@ -26262,6 +26411,7 @@
                   <a:srgbClr val="1B3B6F"/>
                 </a:solidFill>
                 <a:latin typeface="Amiri" pitchFamily="2" charset="-78"/>
+                <a:ea typeface="Amiri" pitchFamily="2" charset="-78"/>
                 <a:cs typeface="Amiri" pitchFamily="2" charset="-78"/>
               </a:rPr>
               <a:t>فِيهَا ______ . هِيَ مُهِمَّةٌ لِأَنَّ ______ .</a:t>
@@ -26468,6 +26618,7 @@
                   <a:srgbClr val="1B3B6F"/>
                 </a:solidFill>
                 <a:latin typeface="Amiri" pitchFamily="2" charset="-78"/>
+                <a:ea typeface="Amiri" pitchFamily="2" charset="-78"/>
                 <a:cs typeface="Amiri" pitchFamily="2" charset="-78"/>
               </a:rPr>
               <a:t>أَرْجُو أَنْ تَتَّصِلُوا بِي. سَأَكُونُ فِي البَيْتِ ______ .</a:t>
@@ -26674,6 +26825,7 @@
                   <a:srgbClr val="1B3B6F"/>
                 </a:solidFill>
                 <a:latin typeface="Amiri" pitchFamily="2" charset="-78"/>
+                <a:ea typeface="Amiri" pitchFamily="2" charset="-78"/>
                 <a:cs typeface="Amiri" pitchFamily="2" charset="-78"/>
               </a:rPr>
               <a:t>مَعَ الشُّكْرِ، ______</a:t>
@@ -26913,13 +27065,9 @@
     <a:fontScheme name="Office">
       <a:majorFont>
         <a:latin typeface="Calibri Light" panose="020F0302020204030204"/>
-        <a:ea typeface=""/>
-        <a:cs typeface=""/>
-        <a:font script="Jpan" typeface="游ゴシック Light"/>
-        <a:font script="Hang" typeface="맑은 고딕"/>
-        <a:font script="Hans" typeface="等线 Light"/>
-        <a:font script="Hant" typeface="新細明體"/>
-        <a:font script="Arab" typeface="Times New Roman"/>
+        <a:ea typeface="Amiri" pitchFamily="2" charset="-78"/>
+        <a:cs typeface="Amiri" pitchFamily="2" charset="-78"/>
+        <a:font script="Arab" typeface="Amiri"/>
         <a:font script="Hebr" typeface="Times New Roman"/>
         <a:font script="Thai" typeface="Angsana New"/>
         <a:font script="Ethi" typeface="Nyala"/>
@@ -26965,13 +27113,9 @@
       </a:majorFont>
       <a:minorFont>
         <a:latin typeface="Calibri" panose="020F0502020204030204"/>
-        <a:ea typeface=""/>
-        <a:cs typeface=""/>
-        <a:font script="Jpan" typeface="游ゴシック"/>
-        <a:font script="Hang" typeface="맑은 고딕"/>
-        <a:font script="Hans" typeface="等线"/>
-        <a:font script="Hant" typeface="新細明體"/>
-        <a:font script="Arab" typeface="Arial"/>
+        <a:ea typeface="Amiri" pitchFamily="2" charset="-78"/>
+        <a:cs typeface="Amiri" pitchFamily="2" charset="-78"/>
+        <a:font script="Arab" typeface="Amiri"/>
         <a:font script="Hebr" typeface="Arial"/>
         <a:font script="Thai" typeface="Cordia New"/>
         <a:font script="Ethi" typeface="Nyala"/>

--- a/Topic_C/Exam_Practice/TC-L10_Writing_Workshop_Measurements_Shapes_Materials.pptx
+++ b/Topic_C/Exam_Practice/TC-L10_Writing_Workshop_Measurements_Shapes_Materials.pptx
@@ -3848,7 +3848,7 @@
                 <a:solidFill>
                   <a:srgbClr val="FFFFFF"/>
                 </a:solidFill>
-                <a:latin typeface="Calibri" pitchFamily="34" charset="0"/>
+                <a:latin typeface="Amiri" pitchFamily="2" charset="-78"/>
                 <a:ea typeface="Amiri" pitchFamily="2" charset="-78"/>
                 <a:cs typeface="Amiri" pitchFamily="2" charset="-78"/>
               </a:rPr>
@@ -3914,7 +3914,7 @@
                 <a:solidFill>
                   <a:srgbClr val="FFFFFF"/>
                 </a:solidFill>
-                <a:latin typeface="Calibri" pitchFamily="34" charset="0"/>
+                <a:latin typeface="Amiri" pitchFamily="2" charset="-78"/>
                 <a:ea typeface="Amiri" pitchFamily="2" charset="-78"/>
                 <a:cs typeface="Amiri" pitchFamily="2" charset="-78"/>
               </a:rPr>
@@ -3980,7 +3980,7 @@
                 <a:solidFill>
                   <a:srgbClr val="FFFFFF"/>
                 </a:solidFill>
-                <a:latin typeface="Calibri" pitchFamily="34" charset="0"/>
+                <a:latin typeface="Amiri" pitchFamily="2" charset="-78"/>
                 <a:ea typeface="Amiri" pitchFamily="2" charset="-78"/>
                 <a:cs typeface="Amiri" pitchFamily="2" charset="-78"/>
               </a:rPr>
@@ -4046,7 +4046,7 @@
                 <a:solidFill>
                   <a:srgbClr val="FFFFFF"/>
                 </a:solidFill>
-                <a:latin typeface="Calibri" pitchFamily="34" charset="0"/>
+                <a:latin typeface="Amiri" pitchFamily="2" charset="-78"/>
                 <a:ea typeface="Amiri" pitchFamily="2" charset="-78"/>
                 <a:cs typeface="Amiri" pitchFamily="2" charset="-78"/>
               </a:rPr>
@@ -4844,7 +4844,7 @@
                 <a:solidFill>
                   <a:srgbClr val="FFFFFF"/>
                 </a:solidFill>
-                <a:latin typeface="Calibri" pitchFamily="34" charset="0"/>
+                <a:latin typeface="Amiri" pitchFamily="2" charset="-78"/>
                 <a:ea typeface="Amiri" pitchFamily="2" charset="-78"/>
                 <a:cs typeface="Amiri" pitchFamily="2" charset="-78"/>
               </a:rPr>
@@ -4910,7 +4910,7 @@
                 <a:solidFill>
                   <a:srgbClr val="FFFFFF"/>
                 </a:solidFill>
-                <a:latin typeface="Calibri" pitchFamily="34" charset="0"/>
+                <a:latin typeface="Amiri" pitchFamily="2" charset="-78"/>
                 <a:ea typeface="Amiri" pitchFamily="2" charset="-78"/>
                 <a:cs typeface="Amiri" pitchFamily="2" charset="-78"/>
               </a:rPr>
@@ -4976,7 +4976,7 @@
                 <a:solidFill>
                   <a:srgbClr val="FFFFFF"/>
                 </a:solidFill>
-                <a:latin typeface="Calibri" pitchFamily="34" charset="0"/>
+                <a:latin typeface="Amiri" pitchFamily="2" charset="-78"/>
                 <a:ea typeface="Amiri" pitchFamily="2" charset="-78"/>
                 <a:cs typeface="Amiri" pitchFamily="2" charset="-78"/>
               </a:rPr>
@@ -5042,7 +5042,7 @@
                 <a:solidFill>
                   <a:srgbClr val="FFFFFF"/>
                 </a:solidFill>
-                <a:latin typeface="Calibri" pitchFamily="34" charset="0"/>
+                <a:latin typeface="Amiri" pitchFamily="2" charset="-78"/>
                 <a:ea typeface="Amiri" pitchFamily="2" charset="-78"/>
                 <a:cs typeface="Amiri" pitchFamily="2" charset="-78"/>
               </a:rPr>
@@ -8599,7 +8599,7 @@
                 <a:solidFill>
                   <a:srgbClr val="FFFFFF"/>
                 </a:solidFill>
-                <a:latin typeface="Calibri" pitchFamily="34" charset="0"/>
+                <a:latin typeface="Amiri" pitchFamily="2" charset="-78"/>
                 <a:ea typeface="Amiri" pitchFamily="2" charset="-78"/>
                 <a:cs typeface="Amiri" pitchFamily="2" charset="-78"/>
               </a:rPr>
@@ -8665,7 +8665,7 @@
                 <a:solidFill>
                   <a:srgbClr val="FFFFFF"/>
                 </a:solidFill>
-                <a:latin typeface="Calibri" pitchFamily="34" charset="0"/>
+                <a:latin typeface="Amiri" pitchFamily="2" charset="-78"/>
                 <a:ea typeface="Amiri" pitchFamily="2" charset="-78"/>
                 <a:cs typeface="Amiri" pitchFamily="2" charset="-78"/>
               </a:rPr>
@@ -8731,7 +8731,7 @@
                 <a:solidFill>
                   <a:srgbClr val="FFFFFF"/>
                 </a:solidFill>
-                <a:latin typeface="Calibri" pitchFamily="34" charset="0"/>
+                <a:latin typeface="Amiri" pitchFamily="2" charset="-78"/>
                 <a:ea typeface="Amiri" pitchFamily="2" charset="-78"/>
                 <a:cs typeface="Amiri" pitchFamily="2" charset="-78"/>
               </a:rPr>
@@ -8797,7 +8797,7 @@
                 <a:solidFill>
                   <a:srgbClr val="FFFFFF"/>
                 </a:solidFill>
-                <a:latin typeface="Calibri" pitchFamily="34" charset="0"/>
+                <a:latin typeface="Amiri" pitchFamily="2" charset="-78"/>
                 <a:ea typeface="Amiri" pitchFamily="2" charset="-78"/>
                 <a:cs typeface="Amiri" pitchFamily="2" charset="-78"/>
               </a:rPr>
@@ -9584,7 +9584,7 @@
                 <a:solidFill>
                   <a:srgbClr val="FFFFFF"/>
                 </a:solidFill>
-                <a:latin typeface="Calibri" pitchFamily="34" charset="0"/>
+                <a:latin typeface="Amiri" pitchFamily="2" charset="-78"/>
                 <a:ea typeface="Amiri" pitchFamily="2" charset="-78"/>
                 <a:cs typeface="Amiri" pitchFamily="2" charset="-78"/>
               </a:rPr>
@@ -9650,7 +9650,7 @@
                 <a:solidFill>
                   <a:srgbClr val="FFFFFF"/>
                 </a:solidFill>
-                <a:latin typeface="Calibri" pitchFamily="34" charset="0"/>
+                <a:latin typeface="Amiri" pitchFamily="2" charset="-78"/>
                 <a:ea typeface="Amiri" pitchFamily="2" charset="-78"/>
                 <a:cs typeface="Amiri" pitchFamily="2" charset="-78"/>
               </a:rPr>
@@ -9716,7 +9716,7 @@
                 <a:solidFill>
                   <a:srgbClr val="FFFFFF"/>
                 </a:solidFill>
-                <a:latin typeface="Calibri" pitchFamily="34" charset="0"/>
+                <a:latin typeface="Amiri" pitchFamily="2" charset="-78"/>
                 <a:ea typeface="Amiri" pitchFamily="2" charset="-78"/>
                 <a:cs typeface="Amiri" pitchFamily="2" charset="-78"/>
               </a:rPr>
@@ -9782,7 +9782,7 @@
                 <a:solidFill>
                   <a:srgbClr val="FFFFFF"/>
                 </a:solidFill>
-                <a:latin typeface="Calibri" pitchFamily="34" charset="0"/>
+                <a:latin typeface="Amiri" pitchFamily="2" charset="-78"/>
                 <a:ea typeface="Amiri" pitchFamily="2" charset="-78"/>
                 <a:cs typeface="Amiri" pitchFamily="2" charset="-78"/>
               </a:rPr>
@@ -10569,7 +10569,7 @@
                 <a:solidFill>
                   <a:srgbClr val="FFFFFF"/>
                 </a:solidFill>
-                <a:latin typeface="Calibri" pitchFamily="34" charset="0"/>
+                <a:latin typeface="Amiri" pitchFamily="2" charset="-78"/>
                 <a:ea typeface="Amiri" pitchFamily="2" charset="-78"/>
                 <a:cs typeface="Amiri" pitchFamily="2" charset="-78"/>
               </a:rPr>
@@ -10635,7 +10635,7 @@
                 <a:solidFill>
                   <a:srgbClr val="FFFFFF"/>
                 </a:solidFill>
-                <a:latin typeface="Calibri" pitchFamily="34" charset="0"/>
+                <a:latin typeface="Amiri" pitchFamily="2" charset="-78"/>
                 <a:ea typeface="Amiri" pitchFamily="2" charset="-78"/>
                 <a:cs typeface="Amiri" pitchFamily="2" charset="-78"/>
               </a:rPr>
@@ -10701,7 +10701,7 @@
                 <a:solidFill>
                   <a:srgbClr val="FFFFFF"/>
                 </a:solidFill>
-                <a:latin typeface="Calibri" pitchFamily="34" charset="0"/>
+                <a:latin typeface="Amiri" pitchFamily="2" charset="-78"/>
                 <a:ea typeface="Amiri" pitchFamily="2" charset="-78"/>
                 <a:cs typeface="Amiri" pitchFamily="2" charset="-78"/>
               </a:rPr>
@@ -10767,7 +10767,7 @@
                 <a:solidFill>
                   <a:srgbClr val="FFFFFF"/>
                 </a:solidFill>
-                <a:latin typeface="Calibri" pitchFamily="34" charset="0"/>
+                <a:latin typeface="Amiri" pitchFamily="2" charset="-78"/>
                 <a:ea typeface="Amiri" pitchFamily="2" charset="-78"/>
                 <a:cs typeface="Amiri" pitchFamily="2" charset="-78"/>
               </a:rPr>
